--- a/99_documents/guide_KU.pptx
+++ b/99_documents/guide_KU.pptx
@@ -6297,7 +6297,7 @@
                 <a:latin typeface="Noto Sans KR"/>
                 <a:ea typeface="Noto Sans KR"/>
               </a:rPr>
-              <a:t>python 00_assets/datasets/_tools/arrange_pcaps.py --dataset vpn16 --src &lt;dl&gt;</a:t>
+              <a:t>python 02_preprocess/00_rename.py --dataset vpn16 --src &lt;dl&gt;</a:t>
             </a:r>
             <a:r>
               <a:rPr sz="1050" b="0" i="0">
@@ -7814,7 +7814,7 @@
                 <a:latin typeface="Noto Sans KR"/>
                 <a:ea typeface="Noto Sans KR"/>
               </a:rPr>
-              <a:t>Eight public datasets: download, arrange, check, align</a:t>
+              <a:t>Eight public datasets: download, rename, check, align</a:t>
             </a:r>
           </a:p>
         </p:txBody>
@@ -11208,7 +11208,7 @@
                 <a:latin typeface="Noto Sans KR"/>
                 <a:ea typeface="Noto Sans KR"/>
               </a:rPr>
-              <a:t>Eight public datasets — official downloads and how each is arranged</a:t>
+              <a:t>Eight public datasets — official files renamed exactly as in our 01_pcap</a:t>
             </a:r>
           </a:p>
         </p:txBody>
@@ -11474,7 +11474,7 @@
                           <a:latin typeface="Noto Sans KR"/>
                           <a:ea typeface="Noto Sans KR"/>
                         </a:rPr>
-                        <a:t>Arrangement (00_assets/datasets/_tools/)</a:t>
+                        <a:t>02_preprocess/00_rename.py — how checked</a:t>
                       </a:r>
                     </a:p>
                   </a:txBody>
@@ -11692,7 +11692,7 @@
                           <a:latin typeface="Noto Sans KR"/>
                           <a:ea typeface="Noto Sans KR"/>
                         </a:rPr>
-                        <a:t>arrange_pcaps.py (keyword rules)</a:t>
+                        <a:t>byte-identical (139 files)</a:t>
                       </a:r>
                     </a:p>
                   </a:txBody>
@@ -11904,7 +11904,7 @@
                           <a:latin typeface="Noto Sans KR"/>
                           <a:ea typeface="Noto Sans KR"/>
                         </a:rPr>
-                        <a:t>arrange_pcaps.py (keyword rules)</a:t>
+                        <a:t>byte-identical (106 files)</a:t>
                       </a:r>
                     </a:p>
                   </a:txBody>
@@ -12116,7 +12116,7 @@
                           <a:latin typeface="Noto Sans KR"/>
                           <a:ea typeface="Noto Sans KR"/>
                         </a:rPr>
-                        <a:t>arrange_pcaps.py (domain folders)</a:t>
+                        <a:t>byte-identical (46,372 files)</a:t>
                       </a:r>
                     </a:p>
                   </a:txBody>
@@ -12328,7 +12328,7 @@
                           <a:latin typeface="Noto Sans KR"/>
                           <a:ea typeface="Noto Sans KR"/>
                         </a:rPr>
-                        <a:t>cispec/relabel_cispec.py</a:t>
+                        <a:t>byte-identical (123,000 files)</a:t>
                       </a:r>
                     </a:p>
                   </a:txBody>
@@ -12540,7 +12540,7 @@
                           <a:latin typeface="Noto Sans KR"/>
                           <a:ea typeface="Noto Sans KR"/>
                         </a:rPr>
-                        <a:t>arrange_pcaps.py (Benign / Malware)</a:t>
+                        <a:t>byte-identical (20; 2 merged)</a:t>
                       </a:r>
                     </a:p>
                   </a:txBody>
@@ -12752,7 +12752,7 @@
                           <a:latin typeface="Noto Sans KR"/>
                           <a:ea typeface="Noto Sans KR"/>
                         </a:rPr>
-                        <a:t>arrange_pcaps.py + official flow labels</a:t>
+                        <a:t>one file per day + flow labels</a:t>
                       </a:r>
                     </a:p>
                   </a:txBody>
@@ -12964,7 +12964,7 @@
                           <a:latin typeface="Noto Sans KR"/>
                           <a:ea typeface="Noto Sans KR"/>
                         </a:rPr>
-                        <a:t>cic18/apply_rename_map.py (4,006 names)</a:t>
+                        <a:t>our name map (4,006 files)</a:t>
                       </a:r>
                     </a:p>
                   </a:txBody>
@@ -13176,7 +13176,7 @@
                           <a:latin typeface="Noto Sans KR"/>
                           <a:ea typeface="Noto Sans KR"/>
                         </a:rPr>
-                        <a:t>arrange_pcaps.py (folder names)</a:t>
+                        <a:t>first 64 KiB identical (309)</a:t>
                       </a:r>
                     </a:p>
                   </a:txBody>
@@ -13736,7 +13736,7 @@
                 <a:latin typeface="Noto Sans KR"/>
                 <a:ea typeface="Noto Sans KR"/>
               </a:rPr>
-              <a:t>download (99_documents/DATASETS.md)</a:t>
+              <a:t>download (DATASETS.md)</a:t>
             </a:r>
           </a:p>
         </p:txBody>
@@ -13876,7 +13876,7 @@
                 <a:latin typeface="Noto Sans KR"/>
                 <a:ea typeface="Noto Sans KR"/>
               </a:rPr>
-              <a:t>Arrange</a:t>
+              <a:t>00_rename.py</a:t>
             </a:r>
           </a:p>
         </p:txBody>
@@ -14689,7 +14689,7 @@
                 <a:latin typeface="Noto Sans KR"/>
                 <a:ea typeface="Noto Sans KR"/>
               </a:rPr>
-              <a:t>    01_dataset/&lt;ds&gt;/session_keys.csv — 7 datasets, iot23 to follow</a:t>
+              <a:t>    01_dataset/&lt;ds&gt;/session_keys.csv — all eight datasets</a:t>
             </a:r>
           </a:p>
           <a:p>

--- a/99_documents/guide_KU.pptx
+++ b/99_documents/guide_KU.pptx
@@ -3441,7 +3441,7 @@
                 <a:latin typeface="Noto Sans KR"/>
                 <a:ea typeface="Noto Sans KR"/>
               </a:rPr>
-              <a:t>,  Eun-Hyeok Park</a:t>
+              <a:t>,  Seung-Woo Nam</a:t>
             </a:r>
             <a:r>
               <a:rPr sz="1400" b="1" i="0" baseline="30000">
@@ -3461,7 +3461,7 @@
                 <a:latin typeface="Noto Sans KR"/>
                 <a:ea typeface="Noto Sans KR"/>
               </a:rPr>
-              <a:t>,  Gyu-Sang Shim</a:t>
+              <a:t>,  Ju-Sung Kim</a:t>
             </a:r>
             <a:r>
               <a:rPr sz="1400" b="1" i="0" baseline="30000">
@@ -3494,7 +3494,7 @@
                 <a:latin typeface="Noto Sans KR"/>
                 <a:ea typeface="Noto Sans KR"/>
               </a:rPr>
-              <a:t>Ui-Jong Jeong</a:t>
+              <a:t>Yang-Seo Choi</a:t>
             </a:r>
             <a:r>
               <a:rPr sz="1400" b="1" i="0" baseline="30000">
@@ -3504,7 +3504,7 @@
                 <a:latin typeface="Noto Sans KR"/>
                 <a:ea typeface="Noto Sans KR"/>
               </a:rPr>
-              <a:t>1</a:t>
+              <a:t>2</a:t>
             </a:r>
             <a:r>
               <a:rPr sz="1400" b="0" i="0">
@@ -3514,7 +3514,7 @@
                 <a:latin typeface="Noto Sans KR"/>
                 <a:ea typeface="Noto Sans KR"/>
               </a:rPr>
-              <a:t>,  Yang-Seo Choi</a:t>
+              <a:t>,  Ui-Jun Baek</a:t>
             </a:r>
             <a:r>
               <a:rPr sz="1400" b="1" i="0" baseline="30000">
@@ -3524,7 +3524,7 @@
                 <a:latin typeface="Noto Sans KR"/>
                 <a:ea typeface="Noto Sans KR"/>
               </a:rPr>
-              <a:t>2</a:t>
+              <a:t>3</a:t>
             </a:r>
             <a:r>
               <a:rPr sz="1400" b="0" i="0">
@@ -3567,7 +3567,7 @@
                 <a:latin typeface="Noto Sans KR"/>
                 <a:ea typeface="Noto Sans KR"/>
               </a:rPr>
-              <a:t>1 Korea University   2 Electronics and Telecommunications Research Institute   * corresponding author</a:t>
+              <a:t>1 Korea University   2 ETRI   3 KISTI   * corresponding author</a:t>
             </a:r>
           </a:p>
         </p:txBody>
